--- a/pptx/Lecture13.pptx
+++ b/pptx/Lecture13.pptx
@@ -5,16 +5,17 @@
     <p:sldMasterId id="2147483648" r:id="rId1"/>
   </p:sldMasterIdLst>
   <p:notesMasterIdLst>
-    <p:notesMasterId r:id="rId9"/>
+    <p:notesMasterId r:id="rId10"/>
   </p:notesMasterIdLst>
   <p:sldIdLst>
     <p:sldId id="256" r:id="rId2"/>
-    <p:sldId id="415" r:id="rId3"/>
-    <p:sldId id="417" r:id="rId4"/>
-    <p:sldId id="416" r:id="rId5"/>
-    <p:sldId id="418" r:id="rId6"/>
-    <p:sldId id="419" r:id="rId7"/>
-    <p:sldId id="420" r:id="rId8"/>
+    <p:sldId id="421" r:id="rId3"/>
+    <p:sldId id="415" r:id="rId4"/>
+    <p:sldId id="417" r:id="rId5"/>
+    <p:sldId id="416" r:id="rId6"/>
+    <p:sldId id="418" r:id="rId7"/>
+    <p:sldId id="419" r:id="rId8"/>
+    <p:sldId id="420" r:id="rId9"/>
   </p:sldIdLst>
   <p:sldSz cx="12192000" cy="6858000"/>
   <p:notesSz cx="6858000" cy="9144000"/>
@@ -461,7 +462,7 @@
           <a:p>
             <a:fld id="{4995A223-E7C9-A243-9A70-FE01E1A1DD65}" type="datetimeFigureOut">
               <a:rPr lang="en-US" smtClean="0"/>
-              <a:t>10/21/26</a:t>
+              <a:t>10/22/2026</a:t>
             </a:fld>
             <a:endParaRPr lang="en-US"/>
           </a:p>
@@ -895,7 +896,7 @@
           <a:p>
             <a:fld id="{117D17FD-8842-8E4F-8C3E-EC8B634B2D5A}" type="slidenum">
               <a:rPr lang="en-US" smtClean="0"/>
-              <a:t>2</a:t>
+              <a:t>3</a:t>
             </a:fld>
             <a:endParaRPr lang="en-US"/>
           </a:p>
@@ -1071,7 +1072,7 @@
           <a:p>
             <a:fld id="{1BF61C71-767E-B84C-BFB3-7B18856D27F4}" type="datetimeFigureOut">
               <a:rPr lang="en-US" smtClean="0"/>
-              <a:t>10/21/26</a:t>
+              <a:t>10/22/2026</a:t>
             </a:fld>
             <a:endParaRPr lang="en-US"/>
           </a:p>
@@ -1279,7 +1280,7 @@
           <a:p>
             <a:fld id="{1BF61C71-767E-B84C-BFB3-7B18856D27F4}" type="datetimeFigureOut">
               <a:rPr lang="en-US" smtClean="0"/>
-              <a:t>10/21/26</a:t>
+              <a:t>10/22/2026</a:t>
             </a:fld>
             <a:endParaRPr lang="en-US"/>
           </a:p>
@@ -1497,7 +1498,7 @@
           <a:p>
             <a:fld id="{1BF61C71-767E-B84C-BFB3-7B18856D27F4}" type="datetimeFigureOut">
               <a:rPr lang="en-US" smtClean="0"/>
-              <a:t>10/21/26</a:t>
+              <a:t>10/22/2026</a:t>
             </a:fld>
             <a:endParaRPr lang="en-US"/>
           </a:p>
@@ -1705,7 +1706,7 @@
           <a:p>
             <a:fld id="{1BF61C71-767E-B84C-BFB3-7B18856D27F4}" type="datetimeFigureOut">
               <a:rPr lang="en-US" smtClean="0"/>
-              <a:t>10/21/26</a:t>
+              <a:t>10/22/2026</a:t>
             </a:fld>
             <a:endParaRPr lang="en-US"/>
           </a:p>
@@ -1989,7 +1990,7 @@
           <a:p>
             <a:fld id="{1BF61C71-767E-B84C-BFB3-7B18856D27F4}" type="datetimeFigureOut">
               <a:rPr lang="en-US" smtClean="0"/>
-              <a:t>10/21/26</a:t>
+              <a:t>10/22/2026</a:t>
             </a:fld>
             <a:endParaRPr lang="en-US"/>
           </a:p>
@@ -2265,7 +2266,7 @@
           <a:p>
             <a:fld id="{1BF61C71-767E-B84C-BFB3-7B18856D27F4}" type="datetimeFigureOut">
               <a:rPr lang="en-US" smtClean="0"/>
-              <a:t>10/21/26</a:t>
+              <a:t>10/22/2026</a:t>
             </a:fld>
             <a:endParaRPr lang="en-US"/>
           </a:p>
@@ -2688,7 +2689,7 @@
           <a:p>
             <a:fld id="{1BF61C71-767E-B84C-BFB3-7B18856D27F4}" type="datetimeFigureOut">
               <a:rPr lang="en-US" smtClean="0"/>
-              <a:t>10/21/26</a:t>
+              <a:t>10/22/2026</a:t>
             </a:fld>
             <a:endParaRPr lang="en-US"/>
           </a:p>
@@ -2838,7 +2839,7 @@
           <a:p>
             <a:fld id="{1BF61C71-767E-B84C-BFB3-7B18856D27F4}" type="datetimeFigureOut">
               <a:rPr lang="en-US" smtClean="0"/>
-              <a:t>10/21/26</a:t>
+              <a:t>10/22/2026</a:t>
             </a:fld>
             <a:endParaRPr lang="en-US"/>
           </a:p>
@@ -2959,7 +2960,7 @@
           <a:p>
             <a:fld id="{1BF61C71-767E-B84C-BFB3-7B18856D27F4}" type="datetimeFigureOut">
               <a:rPr lang="en-US" smtClean="0"/>
-              <a:t>10/21/26</a:t>
+              <a:t>10/22/2026</a:t>
             </a:fld>
             <a:endParaRPr lang="en-US"/>
           </a:p>
@@ -3280,7 +3281,7 @@
           <a:p>
             <a:fld id="{1BF61C71-767E-B84C-BFB3-7B18856D27F4}" type="datetimeFigureOut">
               <a:rPr lang="en-US" smtClean="0"/>
-              <a:t>10/21/26</a:t>
+              <a:t>10/22/2026</a:t>
             </a:fld>
             <a:endParaRPr lang="en-US"/>
           </a:p>
@@ -3577,7 +3578,7 @@
           <a:p>
             <a:fld id="{1BF61C71-767E-B84C-BFB3-7B18856D27F4}" type="datetimeFigureOut">
               <a:rPr lang="en-US" smtClean="0"/>
-              <a:t>10/21/26</a:t>
+              <a:t>10/22/2026</a:t>
             </a:fld>
             <a:endParaRPr lang="en-US"/>
           </a:p>
@@ -3831,7 +3832,7 @@
           <a:p>
             <a:fld id="{1BF61C71-767E-B84C-BFB3-7B18856D27F4}" type="datetimeFigureOut">
               <a:rPr lang="en-US" smtClean="0"/>
-              <a:t>10/21/26</a:t>
+              <a:t>10/22/2026</a:t>
             </a:fld>
             <a:endParaRPr lang="en-US"/>
           </a:p>
@@ -4349,6 +4350,93 @@
 </file>
 
 <file path=ppt/slides/slide2.xml><?xml version="1.0" encoding="utf-8"?>
+<p:sld xmlns:a="http://schemas.openxmlformats.org/drawingml/2006/main" xmlns:r="http://schemas.openxmlformats.org/officeDocument/2006/relationships" xmlns:p="http://schemas.openxmlformats.org/presentationml/2006/main">
+  <p:cSld>
+    <p:spTree>
+      <p:nvGrpSpPr>
+        <p:cNvPr id="1" name=""/>
+        <p:cNvGrpSpPr/>
+        <p:nvPr/>
+      </p:nvGrpSpPr>
+      <p:grpSpPr>
+        <a:xfrm>
+          <a:off x="0" y="0"/>
+          <a:ext cx="0" cy="0"/>
+          <a:chOff x="0" y="0"/>
+          <a:chExt cx="0" cy="0"/>
+        </a:xfrm>
+      </p:grpSpPr>
+      <p:sp>
+        <p:nvSpPr>
+          <p:cNvPr id="2" name="Title 1">
+            <a:extLst>
+              <a:ext uri="{FF2B5EF4-FFF2-40B4-BE49-F238E27FC236}">
+                <a16:creationId xmlns:a16="http://schemas.microsoft.com/office/drawing/2014/main" id="{132C5743-196C-5604-A124-809F11D9F44A}"/>
+              </a:ext>
+            </a:extLst>
+          </p:cNvPr>
+          <p:cNvSpPr>
+            <a:spLocks noGrp="1"/>
+          </p:cNvSpPr>
+          <p:nvPr>
+            <p:ph type="title"/>
+          </p:nvPr>
+        </p:nvSpPr>
+        <p:spPr/>
+        <p:txBody>
+          <a:bodyPr/>
+          <a:lstStyle/>
+          <a:p>
+            <a:endParaRPr lang="en-US"/>
+          </a:p>
+        </p:txBody>
+      </p:sp>
+      <p:pic>
+        <p:nvPicPr>
+          <p:cNvPr id="5" name="Content Placeholder 4">
+            <a:extLst>
+              <a:ext uri="{FF2B5EF4-FFF2-40B4-BE49-F238E27FC236}">
+                <a16:creationId xmlns:a16="http://schemas.microsoft.com/office/drawing/2014/main" id="{8EC80DDE-9D15-FC56-7740-3D9FB571B962}"/>
+              </a:ext>
+            </a:extLst>
+          </p:cNvPr>
+          <p:cNvPicPr>
+            <a:picLocks noGrp="1" noChangeAspect="1"/>
+          </p:cNvPicPr>
+          <p:nvPr>
+            <p:ph idx="1"/>
+          </p:nvPr>
+        </p:nvPicPr>
+        <p:blipFill>
+          <a:blip r:embed="rId2"/>
+          <a:stretch>
+            <a:fillRect/>
+          </a:stretch>
+        </p:blipFill>
+        <p:spPr>
+          <a:xfrm>
+            <a:off x="2414587" y="1742281"/>
+            <a:ext cx="7362825" cy="4133850"/>
+          </a:xfrm>
+          <a:prstGeom prst="rect">
+            <a:avLst/>
+          </a:prstGeom>
+        </p:spPr>
+      </p:pic>
+    </p:spTree>
+    <p:extLst>
+      <p:ext uri="{BB962C8B-B14F-4D97-AF65-F5344CB8AC3E}">
+        <p14:creationId xmlns:p14="http://schemas.microsoft.com/office/powerpoint/2010/main" val="1667929414"/>
+      </p:ext>
+    </p:extLst>
+  </p:cSld>
+  <p:clrMapOvr>
+    <a:masterClrMapping/>
+  </p:clrMapOvr>
+</p:sld>
+</file>
+
+<file path=ppt/slides/slide3.xml><?xml version="1.0" encoding="utf-8"?>
 <p:sld xmlns:a="http://schemas.openxmlformats.org/drawingml/2006/main" xmlns:r="http://schemas.openxmlformats.org/officeDocument/2006/relationships" xmlns:p="http://schemas.openxmlformats.org/presentationml/2006/main">
   <p:cSld>
     <p:spTree>
@@ -4846,128 +4934,6 @@
 </p:sld>
 </file>
 
-<file path=ppt/slides/slide3.xml><?xml version="1.0" encoding="utf-8"?>
-<p:sld xmlns:a="http://schemas.openxmlformats.org/drawingml/2006/main" xmlns:r="http://schemas.openxmlformats.org/officeDocument/2006/relationships" xmlns:p="http://schemas.openxmlformats.org/presentationml/2006/main">
-  <p:cSld>
-    <p:spTree>
-      <p:nvGrpSpPr>
-        <p:cNvPr id="1" name=""/>
-        <p:cNvGrpSpPr/>
-        <p:nvPr/>
-      </p:nvGrpSpPr>
-      <p:grpSpPr>
-        <a:xfrm>
-          <a:off x="0" y="0"/>
-          <a:ext cx="0" cy="0"/>
-          <a:chOff x="0" y="0"/>
-          <a:chExt cx="0" cy="0"/>
-        </a:xfrm>
-      </p:grpSpPr>
-      <p:sp>
-        <p:nvSpPr>
-          <p:cNvPr id="2" name="Title 1">
-            <a:extLst>
-              <a:ext uri="{FF2B5EF4-FFF2-40B4-BE49-F238E27FC236}">
-                <a16:creationId xmlns:a16="http://schemas.microsoft.com/office/drawing/2014/main" id="{E775F273-69B3-FA81-718C-77BBBE1A4D7B}"/>
-              </a:ext>
-            </a:extLst>
-          </p:cNvPr>
-          <p:cNvSpPr>
-            <a:spLocks noGrp="1"/>
-          </p:cNvSpPr>
-          <p:nvPr>
-            <p:ph type="title"/>
-          </p:nvPr>
-        </p:nvSpPr>
-        <p:spPr/>
-        <p:txBody>
-          <a:bodyPr/>
-          <a:lstStyle/>
-          <a:p>
-            <a:r>
-              <a:rPr lang="en-GB" dirty="0"/>
-              <a:t>What are we recruiting this athlete to do?</a:t>
-            </a:r>
-            <a:endParaRPr lang="en-US" dirty="0"/>
-          </a:p>
-        </p:txBody>
-      </p:sp>
-      <p:sp>
-        <p:nvSpPr>
-          <p:cNvPr id="3" name="Content Placeholder 2">
-            <a:extLst>
-              <a:ext uri="{FF2B5EF4-FFF2-40B4-BE49-F238E27FC236}">
-                <a16:creationId xmlns:a16="http://schemas.microsoft.com/office/drawing/2014/main" id="{E0466C12-B59A-4D6E-681F-E3C12DC96EED}"/>
-              </a:ext>
-            </a:extLst>
-          </p:cNvPr>
-          <p:cNvSpPr>
-            <a:spLocks noGrp="1"/>
-          </p:cNvSpPr>
-          <p:nvPr>
-            <p:ph idx="1"/>
-          </p:nvPr>
-        </p:nvSpPr>
-        <p:spPr/>
-        <p:txBody>
-          <a:bodyPr/>
-          <a:lstStyle/>
-          <a:p>
-            <a:pPr lvl="0"/>
-            <a:r>
-              <a:rPr lang="en-GB" dirty="0"/>
-              <a:t>Divide into groups:</a:t>
-            </a:r>
-          </a:p>
-          <a:p>
-            <a:pPr lvl="1"/>
-            <a:r>
-              <a:rPr lang="en-GB" dirty="0"/>
-              <a:t>Team A needs a perimeter shooter.</a:t>
-            </a:r>
-          </a:p>
-          <a:p>
-            <a:pPr lvl="1"/>
-            <a:r>
-              <a:rPr lang="en-GB" dirty="0"/>
-              <a:t>Team B needs a primary ball handler.</a:t>
-            </a:r>
-          </a:p>
-          <a:p>
-            <a:pPr lvl="1"/>
-            <a:r>
-              <a:rPr lang="en-GB" dirty="0"/>
-              <a:t>Team C needs an athletic developmental prospect.</a:t>
-            </a:r>
-          </a:p>
-          <a:p>
-            <a:pPr lvl="1"/>
-            <a:endParaRPr lang="en-GB" dirty="0"/>
-          </a:p>
-          <a:p>
-            <a:r>
-              <a:rPr lang="en-GB" dirty="0"/>
-              <a:t>Which athlete did you select?</a:t>
-            </a:r>
-          </a:p>
-          <a:p>
-            <a:endParaRPr lang="en-US" dirty="0"/>
-          </a:p>
-        </p:txBody>
-      </p:sp>
-    </p:spTree>
-    <p:extLst>
-      <p:ext uri="{BB962C8B-B14F-4D97-AF65-F5344CB8AC3E}">
-        <p14:creationId xmlns:p14="http://schemas.microsoft.com/office/powerpoint/2010/main" val="667051925"/>
-      </p:ext>
-    </p:extLst>
-  </p:cSld>
-  <p:clrMapOvr>
-    <a:masterClrMapping/>
-  </p:clrMapOvr>
-</p:sld>
-</file>
-
 <file path=ppt/slides/slide4.xml><?xml version="1.0" encoding="utf-8"?>
 <p:sld xmlns:a="http://schemas.openxmlformats.org/drawingml/2006/main" xmlns:r="http://schemas.openxmlformats.org/officeDocument/2006/relationships" xmlns:p="http://schemas.openxmlformats.org/presentationml/2006/main">
   <p:cSld>
@@ -4990,6 +4956,128 @@
           <p:cNvPr id="2" name="Title 1">
             <a:extLst>
               <a:ext uri="{FF2B5EF4-FFF2-40B4-BE49-F238E27FC236}">
+                <a16:creationId xmlns:a16="http://schemas.microsoft.com/office/drawing/2014/main" id="{E775F273-69B3-FA81-718C-77BBBE1A4D7B}"/>
+              </a:ext>
+            </a:extLst>
+          </p:cNvPr>
+          <p:cNvSpPr>
+            <a:spLocks noGrp="1"/>
+          </p:cNvSpPr>
+          <p:nvPr>
+            <p:ph type="title"/>
+          </p:nvPr>
+        </p:nvSpPr>
+        <p:spPr/>
+        <p:txBody>
+          <a:bodyPr/>
+          <a:lstStyle/>
+          <a:p>
+            <a:r>
+              <a:rPr lang="en-GB" dirty="0"/>
+              <a:t>What are we recruiting this athlete to do?</a:t>
+            </a:r>
+            <a:endParaRPr lang="en-US" dirty="0"/>
+          </a:p>
+        </p:txBody>
+      </p:sp>
+      <p:sp>
+        <p:nvSpPr>
+          <p:cNvPr id="3" name="Content Placeholder 2">
+            <a:extLst>
+              <a:ext uri="{FF2B5EF4-FFF2-40B4-BE49-F238E27FC236}">
+                <a16:creationId xmlns:a16="http://schemas.microsoft.com/office/drawing/2014/main" id="{E0466C12-B59A-4D6E-681F-E3C12DC96EED}"/>
+              </a:ext>
+            </a:extLst>
+          </p:cNvPr>
+          <p:cNvSpPr>
+            <a:spLocks noGrp="1"/>
+          </p:cNvSpPr>
+          <p:nvPr>
+            <p:ph idx="1"/>
+          </p:nvPr>
+        </p:nvSpPr>
+        <p:spPr/>
+        <p:txBody>
+          <a:bodyPr/>
+          <a:lstStyle/>
+          <a:p>
+            <a:pPr lvl="0"/>
+            <a:r>
+              <a:rPr lang="en-GB" dirty="0"/>
+              <a:t>Divide into groups:</a:t>
+            </a:r>
+          </a:p>
+          <a:p>
+            <a:pPr lvl="1"/>
+            <a:r>
+              <a:rPr lang="en-GB" dirty="0"/>
+              <a:t>Team A needs a perimeter shooter.</a:t>
+            </a:r>
+          </a:p>
+          <a:p>
+            <a:pPr lvl="1"/>
+            <a:r>
+              <a:rPr lang="en-GB" dirty="0"/>
+              <a:t>Team B needs a primary ball handler.</a:t>
+            </a:r>
+          </a:p>
+          <a:p>
+            <a:pPr lvl="1"/>
+            <a:r>
+              <a:rPr lang="en-GB" dirty="0"/>
+              <a:t>Team C needs an athletic developmental prospect.</a:t>
+            </a:r>
+          </a:p>
+          <a:p>
+            <a:pPr lvl="1"/>
+            <a:endParaRPr lang="en-GB" dirty="0"/>
+          </a:p>
+          <a:p>
+            <a:r>
+              <a:rPr lang="en-GB" dirty="0"/>
+              <a:t>Which athlete did you select?</a:t>
+            </a:r>
+          </a:p>
+          <a:p>
+            <a:endParaRPr lang="en-US" dirty="0"/>
+          </a:p>
+        </p:txBody>
+      </p:sp>
+    </p:spTree>
+    <p:extLst>
+      <p:ext uri="{BB962C8B-B14F-4D97-AF65-F5344CB8AC3E}">
+        <p14:creationId xmlns:p14="http://schemas.microsoft.com/office/powerpoint/2010/main" val="667051925"/>
+      </p:ext>
+    </p:extLst>
+  </p:cSld>
+  <p:clrMapOvr>
+    <a:masterClrMapping/>
+  </p:clrMapOvr>
+</p:sld>
+</file>
+
+<file path=ppt/slides/slide5.xml><?xml version="1.0" encoding="utf-8"?>
+<p:sld xmlns:a="http://schemas.openxmlformats.org/drawingml/2006/main" xmlns:r="http://schemas.openxmlformats.org/officeDocument/2006/relationships" xmlns:p="http://schemas.openxmlformats.org/presentationml/2006/main">
+  <p:cSld>
+    <p:spTree>
+      <p:nvGrpSpPr>
+        <p:cNvPr id="1" name=""/>
+        <p:cNvGrpSpPr/>
+        <p:nvPr/>
+      </p:nvGrpSpPr>
+      <p:grpSpPr>
+        <a:xfrm>
+          <a:off x="0" y="0"/>
+          <a:ext cx="0" cy="0"/>
+          <a:chOff x="0" y="0"/>
+          <a:chExt cx="0" cy="0"/>
+        </a:xfrm>
+      </p:grpSpPr>
+      <p:sp>
+        <p:nvSpPr>
+          <p:cNvPr id="2" name="Title 1">
+            <a:extLst>
+              <a:ext uri="{FF2B5EF4-FFF2-40B4-BE49-F238E27FC236}">
                 <a16:creationId xmlns:a16="http://schemas.microsoft.com/office/drawing/2014/main" id="{4A30CE9A-CDBF-48F7-70FE-EE6ED0B9AB70}"/>
               </a:ext>
             </a:extLst>
@@ -5014,8 +5102,8 @@
           </a:p>
         </p:txBody>
       </p:sp>
-      <mc:AlternateContent xmlns:mc="http://schemas.openxmlformats.org/markup-compatibility/2006">
-        <mc:Choice xmlns:a14="http://schemas.microsoft.com/office/drawing/2010/main" Requires="a14">
+      <mc:AlternateContent xmlns:mc="http://schemas.openxmlformats.org/markup-compatibility/2006" xmlns:a14="http://schemas.microsoft.com/office/drawing/2010/main">
+        <mc:Choice Requires="a14">
           <p:sp>
             <p:nvSpPr>
               <p:cNvPr id="3" name="Content Placeholder 2">
@@ -5260,7 +5348,7 @@
             </p:txBody>
           </p:sp>
         </mc:Choice>
-        <mc:Fallback>
+        <mc:Fallback xmlns="">
           <p:sp>
             <p:nvSpPr>
               <p:cNvPr id="3" name="Content Placeholder 2">
@@ -5313,147 +5401,6 @@
 </p:sld>
 </file>
 
-<file path=ppt/slides/slide5.xml><?xml version="1.0" encoding="utf-8"?>
-<p:sld xmlns:a="http://schemas.openxmlformats.org/drawingml/2006/main" xmlns:r="http://schemas.openxmlformats.org/officeDocument/2006/relationships" xmlns:p="http://schemas.openxmlformats.org/presentationml/2006/main">
-  <p:cSld>
-    <p:spTree>
-      <p:nvGrpSpPr>
-        <p:cNvPr id="1" name=""/>
-        <p:cNvGrpSpPr/>
-        <p:nvPr/>
-      </p:nvGrpSpPr>
-      <p:grpSpPr>
-        <a:xfrm>
-          <a:off x="0" y="0"/>
-          <a:ext cx="0" cy="0"/>
-          <a:chOff x="0" y="0"/>
-          <a:chExt cx="0" cy="0"/>
-        </a:xfrm>
-      </p:grpSpPr>
-      <p:sp>
-        <p:nvSpPr>
-          <p:cNvPr id="2" name="Title 1">
-            <a:extLst>
-              <a:ext uri="{FF2B5EF4-FFF2-40B4-BE49-F238E27FC236}">
-                <a16:creationId xmlns:a16="http://schemas.microsoft.com/office/drawing/2014/main" id="{D06B71A9-3B3A-E579-C61D-33F38DC20189}"/>
-              </a:ext>
-            </a:extLst>
-          </p:cNvPr>
-          <p:cNvSpPr>
-            <a:spLocks noGrp="1"/>
-          </p:cNvSpPr>
-          <p:nvPr>
-            <p:ph type="title"/>
-          </p:nvPr>
-        </p:nvSpPr>
-        <p:spPr/>
-        <p:txBody>
-          <a:bodyPr/>
-          <a:lstStyle/>
-          <a:p>
-            <a:r>
-              <a:rPr lang="en-US" dirty="0"/>
-              <a:t>Choosing the weights</a:t>
-            </a:r>
-          </a:p>
-        </p:txBody>
-      </p:sp>
-      <p:sp>
-        <p:nvSpPr>
-          <p:cNvPr id="3" name="Content Placeholder 2">
-            <a:extLst>
-              <a:ext uri="{FF2B5EF4-FFF2-40B4-BE49-F238E27FC236}">
-                <a16:creationId xmlns:a16="http://schemas.microsoft.com/office/drawing/2014/main" id="{70158EE2-52A1-2593-57D7-1B38C1589386}"/>
-              </a:ext>
-            </a:extLst>
-          </p:cNvPr>
-          <p:cNvSpPr>
-            <a:spLocks noGrp="1"/>
-          </p:cNvSpPr>
-          <p:nvPr>
-            <p:ph idx="1"/>
-          </p:nvPr>
-        </p:nvSpPr>
-        <p:spPr/>
-        <p:txBody>
-          <a:bodyPr/>
-          <a:lstStyle/>
-          <a:p>
-            <a:r>
-              <a:rPr lang="en-GB" dirty="0"/>
-              <a:t>The most valuable discussion is </a:t>
-            </a:r>
-            <a:r>
-              <a:rPr lang="en-GB" b="1" dirty="0"/>
-              <a:t>how to choose the weights</a:t>
-            </a:r>
-            <a:r>
-              <a:rPr lang="en-GB" dirty="0"/>
-              <a:t>:</a:t>
-            </a:r>
-          </a:p>
-          <a:p>
-            <a:pPr lvl="1"/>
-            <a:r>
-              <a:rPr lang="en-GB" b="1" dirty="0"/>
-              <a:t>Role and team needs:</a:t>
-            </a:r>
-            <a:r>
-              <a:rPr lang="en-GB" dirty="0"/>
-              <a:t> What qualities does the athlete need to contribute?</a:t>
-            </a:r>
-          </a:p>
-          <a:p>
-            <a:pPr lvl="1"/>
-            <a:r>
-              <a:rPr lang="en-GB" b="1" dirty="0"/>
-              <a:t>Sport knowledge:</a:t>
-            </a:r>
-            <a:r>
-              <a:rPr lang="en-GB" dirty="0"/>
-              <a:t> What do coaches and scouts consider relevant, and why?</a:t>
-            </a:r>
-          </a:p>
-          <a:p>
-            <a:pPr lvl="1"/>
-            <a:r>
-              <a:rPr lang="en-GB" b="1" dirty="0"/>
-              <a:t>Evidence:</a:t>
-            </a:r>
-            <a:r>
-              <a:rPr lang="en-GB" dirty="0"/>
-              <a:t> Do these measures help predict the outcome we care about?</a:t>
-            </a:r>
-          </a:p>
-          <a:p>
-            <a:pPr lvl="1"/>
-            <a:r>
-              <a:rPr lang="en-GB" b="1" dirty="0"/>
-              <a:t>Measurement quality:</a:t>
-            </a:r>
-            <a:r>
-              <a:rPr lang="en-GB" dirty="0"/>
-              <a:t> Is the apparent strength based on reliable testing and enough observations?</a:t>
-            </a:r>
-          </a:p>
-          <a:p>
-            <a:endParaRPr lang="en-US" dirty="0"/>
-          </a:p>
-        </p:txBody>
-      </p:sp>
-    </p:spTree>
-    <p:extLst>
-      <p:ext uri="{BB962C8B-B14F-4D97-AF65-F5344CB8AC3E}">
-        <p14:creationId xmlns:p14="http://schemas.microsoft.com/office/powerpoint/2010/main" val="1419506310"/>
-      </p:ext>
-    </p:extLst>
-  </p:cSld>
-  <p:clrMapOvr>
-    <a:masterClrMapping/>
-  </p:clrMapOvr>
-</p:sld>
-</file>
-
 <file path=ppt/slides/slide6.xml><?xml version="1.0" encoding="utf-8"?>
 <p:sld xmlns:a="http://schemas.openxmlformats.org/drawingml/2006/main" xmlns:r="http://schemas.openxmlformats.org/officeDocument/2006/relationships" xmlns:p="http://schemas.openxmlformats.org/presentationml/2006/main">
   <p:cSld>
@@ -5476,6 +5423,147 @@
           <p:cNvPr id="2" name="Title 1">
             <a:extLst>
               <a:ext uri="{FF2B5EF4-FFF2-40B4-BE49-F238E27FC236}">
+                <a16:creationId xmlns:a16="http://schemas.microsoft.com/office/drawing/2014/main" id="{D06B71A9-3B3A-E579-C61D-33F38DC20189}"/>
+              </a:ext>
+            </a:extLst>
+          </p:cNvPr>
+          <p:cNvSpPr>
+            <a:spLocks noGrp="1"/>
+          </p:cNvSpPr>
+          <p:nvPr>
+            <p:ph type="title"/>
+          </p:nvPr>
+        </p:nvSpPr>
+        <p:spPr/>
+        <p:txBody>
+          <a:bodyPr/>
+          <a:lstStyle/>
+          <a:p>
+            <a:r>
+              <a:rPr lang="en-US" dirty="0"/>
+              <a:t>Choosing the weights</a:t>
+            </a:r>
+          </a:p>
+        </p:txBody>
+      </p:sp>
+      <p:sp>
+        <p:nvSpPr>
+          <p:cNvPr id="3" name="Content Placeholder 2">
+            <a:extLst>
+              <a:ext uri="{FF2B5EF4-FFF2-40B4-BE49-F238E27FC236}">
+                <a16:creationId xmlns:a16="http://schemas.microsoft.com/office/drawing/2014/main" id="{70158EE2-52A1-2593-57D7-1B38C1589386}"/>
+              </a:ext>
+            </a:extLst>
+          </p:cNvPr>
+          <p:cNvSpPr>
+            <a:spLocks noGrp="1"/>
+          </p:cNvSpPr>
+          <p:nvPr>
+            <p:ph idx="1"/>
+          </p:nvPr>
+        </p:nvSpPr>
+        <p:spPr/>
+        <p:txBody>
+          <a:bodyPr/>
+          <a:lstStyle/>
+          <a:p>
+            <a:r>
+              <a:rPr lang="en-GB" dirty="0"/>
+              <a:t>The most valuable discussion is </a:t>
+            </a:r>
+            <a:r>
+              <a:rPr lang="en-GB" b="1" dirty="0"/>
+              <a:t>how to choose the weights</a:t>
+            </a:r>
+            <a:r>
+              <a:rPr lang="en-GB" dirty="0"/>
+              <a:t>:</a:t>
+            </a:r>
+          </a:p>
+          <a:p>
+            <a:pPr lvl="1"/>
+            <a:r>
+              <a:rPr lang="en-GB" b="1" dirty="0"/>
+              <a:t>Role and team needs:</a:t>
+            </a:r>
+            <a:r>
+              <a:rPr lang="en-GB" dirty="0"/>
+              <a:t> What qualities does the athlete need to contribute?</a:t>
+            </a:r>
+          </a:p>
+          <a:p>
+            <a:pPr lvl="1"/>
+            <a:r>
+              <a:rPr lang="en-GB" b="1" dirty="0"/>
+              <a:t>Sport knowledge:</a:t>
+            </a:r>
+            <a:r>
+              <a:rPr lang="en-GB" dirty="0"/>
+              <a:t> What do coaches and scouts consider relevant, and why?</a:t>
+            </a:r>
+          </a:p>
+          <a:p>
+            <a:pPr lvl="1"/>
+            <a:r>
+              <a:rPr lang="en-GB" b="1" dirty="0"/>
+              <a:t>Evidence:</a:t>
+            </a:r>
+            <a:r>
+              <a:rPr lang="en-GB" dirty="0"/>
+              <a:t> Do these measures help predict the outcome we care about?</a:t>
+            </a:r>
+          </a:p>
+          <a:p>
+            <a:pPr lvl="1"/>
+            <a:r>
+              <a:rPr lang="en-GB" b="1" dirty="0"/>
+              <a:t>Measurement quality:</a:t>
+            </a:r>
+            <a:r>
+              <a:rPr lang="en-GB" dirty="0"/>
+              <a:t> Is the apparent strength based on reliable testing and enough observations?</a:t>
+            </a:r>
+          </a:p>
+          <a:p>
+            <a:endParaRPr lang="en-US" dirty="0"/>
+          </a:p>
+        </p:txBody>
+      </p:sp>
+    </p:spTree>
+    <p:extLst>
+      <p:ext uri="{BB962C8B-B14F-4D97-AF65-F5344CB8AC3E}">
+        <p14:creationId xmlns:p14="http://schemas.microsoft.com/office/powerpoint/2010/main" val="1419506310"/>
+      </p:ext>
+    </p:extLst>
+  </p:cSld>
+  <p:clrMapOvr>
+    <a:masterClrMapping/>
+  </p:clrMapOvr>
+</p:sld>
+</file>
+
+<file path=ppt/slides/slide7.xml><?xml version="1.0" encoding="utf-8"?>
+<p:sld xmlns:a="http://schemas.openxmlformats.org/drawingml/2006/main" xmlns:r="http://schemas.openxmlformats.org/officeDocument/2006/relationships" xmlns:p="http://schemas.openxmlformats.org/presentationml/2006/main">
+  <p:cSld>
+    <p:spTree>
+      <p:nvGrpSpPr>
+        <p:cNvPr id="1" name=""/>
+        <p:cNvGrpSpPr/>
+        <p:nvPr/>
+      </p:nvGrpSpPr>
+      <p:grpSpPr>
+        <a:xfrm>
+          <a:off x="0" y="0"/>
+          <a:ext cx="0" cy="0"/>
+          <a:chOff x="0" y="0"/>
+          <a:chExt cx="0" cy="0"/>
+        </a:xfrm>
+      </p:grpSpPr>
+      <p:sp>
+        <p:nvSpPr>
+          <p:cNvPr id="2" name="Title 1">
+            <a:extLst>
+              <a:ext uri="{FF2B5EF4-FFF2-40B4-BE49-F238E27FC236}">
                 <a16:creationId xmlns:a16="http://schemas.microsoft.com/office/drawing/2014/main" id="{034C223B-9CF3-43C4-66E0-D5E2FA2AE4E4}"/>
               </a:ext>
             </a:extLst>
@@ -5572,7 +5660,7 @@
 </p:sld>
 </file>
 
-<file path=ppt/slides/slide7.xml><?xml version="1.0" encoding="utf-8"?>
+<file path=ppt/slides/slide8.xml><?xml version="1.0" encoding="utf-8"?>
 <p:sld xmlns:a="http://schemas.openxmlformats.org/drawingml/2006/main" xmlns:r="http://schemas.openxmlformats.org/officeDocument/2006/relationships" xmlns:p="http://schemas.openxmlformats.org/presentationml/2006/main">
   <p:cSld>
     <p:spTree>
